--- a/artifacts/editorial_accent_20261022/pptx/Figure06_Accent.pptx
+++ b/artifacts/editorial_accent_20261022/pptx/Figure06_Accent.pptx
@@ -52,6 +52,14 @@
 <file path=ppt/slides/slide1.xml><?xml version="1.0" encoding="utf-8"?>
 <p:sld xmlns:a="http://schemas.openxmlformats.org/drawingml/2006/main" xmlns:r="http://schemas.openxmlformats.org/officeDocument/2006/relationships" xmlns:p="http://schemas.openxmlformats.org/presentationml/2006/main">
   <p:cSld>
+    <p:bg>
+      <p:bgPr>
+        <a:solidFill>
+          <a:srgbClr val="FFFFFF"/>
+        </a:solidFill>
+        <a:effectLst/>
+      </p:bgPr>
+    </p:bg>
     <p:spTree>
       <p:nvGrpSpPr>
         <p:cNvPr id="1" name=""/>
@@ -115,6 +123,10 @@
                 </a:solidFill>
               </a:ln>
             </p:spPr>
+            <p:txBody>
+              <a:bodyPr/>
+              <a:p/>
+            </p:txBody>
           </p:sp>
           <p:sp>
             <p:nvSpPr>
@@ -159,6 +171,10 @@
                 </a:solidFill>
               </a:ln>
             </p:spPr>
+            <p:txBody>
+              <a:bodyPr/>
+              <a:p/>
+            </p:txBody>
           </p:sp>
           <p:sp>
             <p:nvSpPr>
@@ -181,6 +197,10 @@
                 </a:solidFill>
               </a:ln>
             </p:spPr>
+            <p:txBody>
+              <a:bodyPr/>
+              <a:p/>
+            </p:txBody>
           </p:sp>
         </p:grpSp>
         <p:sp>
@@ -212,7 +232,7 @@
                   <a:solidFill>
                     <a:srgbClr val="222222"/>
                   </a:solidFill>
-                  <a:latin typeface="Comic Sans MS"/>
+                  <a:latin typeface="Times New Roman"/>
                   <a:ea typeface="Times New Roman"/>
                 </a:rPr>
                 <a:t>Planning &amp; Orchestration</a:t>
@@ -249,7 +269,7 @@
                   <a:solidFill>
                     <a:srgbClr val="222222"/>
                   </a:solidFill>
-                  <a:latin typeface="Arial"/>
+                  <a:latin typeface="Times New Roman"/>
                   <a:ea typeface="Times New Roman"/>
                 </a:rPr>
                 <a:t>Dependencies and handoffs</a:t>
@@ -349,6 +369,10 @@
                 </a:solidFill>
               </a:ln>
             </p:spPr>
+            <p:txBody>
+              <a:bodyPr/>
+              <a:p/>
+            </p:txBody>
           </p:sp>
           <p:sp>
             <p:nvSpPr>
@@ -419,6 +443,10 @@
                 </a:solidFill>
               </a:ln>
             </p:spPr>
+            <p:txBody>
+              <a:bodyPr/>
+              <a:p/>
+            </p:txBody>
           </p:sp>
         </p:grpSp>
         <p:sp>
@@ -450,7 +478,7 @@
                   <a:solidFill>
                     <a:srgbClr val="222222"/>
                   </a:solidFill>
-                  <a:latin typeface="Comic Sans MS"/>
+                  <a:latin typeface="Times New Roman"/>
                   <a:ea typeface="Times New Roman"/>
                 </a:rPr>
                 <a:t>Interface &amp; Interaction</a:t>
@@ -487,7 +515,7 @@
                   <a:solidFill>
                     <a:srgbClr val="222222"/>
                   </a:solidFill>
-                  <a:latin typeface="Arial"/>
+                  <a:latin typeface="Times New Roman"/>
                   <a:ea typeface="Times New Roman"/>
                 </a:rPr>
                 <a:t>Observations and actions</a:t>
@@ -607,6 +635,10 @@
                 </a:solidFill>
               </a:ln>
             </p:spPr>
+            <p:txBody>
+              <a:bodyPr/>
+              <a:p/>
+            </p:txBody>
           </p:sp>
         </p:grpSp>
         <p:sp>
@@ -638,7 +670,7 @@
                   <a:solidFill>
                     <a:srgbClr val="222222"/>
                   </a:solidFill>
-                  <a:latin typeface="Comic Sans MS"/>
+                  <a:latin typeface="Times New Roman"/>
                   <a:ea typeface="Times New Roman"/>
                 </a:rPr>
                 <a:t>Tools &amp; Execution</a:t>
@@ -675,7 +707,7 @@
                   <a:solidFill>
                     <a:srgbClr val="222222"/>
                   </a:solidFill>
-                  <a:latin typeface="Arial"/>
+                  <a:latin typeface="Times New Roman"/>
                   <a:ea typeface="Times New Roman"/>
                 </a:rPr>
                 <a:t>Calls, artifacts and status</a:t>
@@ -718,6 +750,10 @@
                 </a:solidFill>
               </a:ln>
             </p:spPr>
+            <p:txBody>
+              <a:bodyPr/>
+              <a:p/>
+            </p:txBody>
           </p:sp>
           <p:sp>
             <p:nvSpPr>
@@ -767,6 +803,10 @@
                 </a:solidFill>
               </a:ln>
             </p:spPr>
+            <p:txBody>
+              <a:bodyPr/>
+              <a:p/>
+            </p:txBody>
           </p:sp>
           <p:sp>
             <p:nvSpPr>
@@ -810,6 +850,10 @@
                 </a:solidFill>
               </a:ln>
             </p:spPr>
+            <p:txBody>
+              <a:bodyPr/>
+              <a:p/>
+            </p:txBody>
           </p:sp>
         </p:grpSp>
         <p:sp>
@@ -841,7 +885,7 @@
                   <a:solidFill>
                     <a:srgbClr val="222222"/>
                   </a:solidFill>
-                  <a:latin typeface="Comic Sans MS"/>
+                  <a:latin typeface="Times New Roman"/>
                   <a:ea typeface="Times New Roman"/>
                 </a:rPr>
                 <a:t>Memory &amp; Context</a:t>
@@ -878,7 +922,7 @@
                   <a:solidFill>
                     <a:srgbClr val="222222"/>
                   </a:solidFill>
-                  <a:latin typeface="Arial"/>
+                  <a:latin typeface="Times New Roman"/>
                   <a:ea typeface="Times New Roman"/>
                 </a:rPr>
                 <a:t>Evidence and working state</a:t>
@@ -938,6 +982,10 @@
                 </a:solidFill>
               </a:ln>
             </p:spPr>
+            <p:txBody>
+              <a:bodyPr/>
+              <a:p/>
+            </p:txBody>
           </p:sp>
           <p:sp>
             <p:nvSpPr>
@@ -960,6 +1008,10 @@
                 </a:solidFill>
               </a:ln>
             </p:spPr>
+            <p:txBody>
+              <a:bodyPr/>
+              <a:p/>
+            </p:txBody>
           </p:sp>
           <p:sp>
             <p:nvSpPr>
@@ -996,6 +1048,10 @@
                 </a:solidFill>
               </a:ln>
             </p:spPr>
+            <p:txBody>
+              <a:bodyPr/>
+              <a:p/>
+            </p:txBody>
           </p:sp>
           <p:sp>
             <p:nvSpPr>
@@ -1032,6 +1088,10 @@
                 </a:solidFill>
               </a:ln>
             </p:spPr>
+            <p:txBody>
+              <a:bodyPr/>
+              <a:p/>
+            </p:txBody>
           </p:sp>
           <p:sp>
             <p:nvSpPr>
@@ -1068,6 +1128,10 @@
                 </a:solidFill>
               </a:ln>
             </p:spPr>
+            <p:txBody>
+              <a:bodyPr/>
+              <a:p/>
+            </p:txBody>
           </p:sp>
           <p:sp>
             <p:nvSpPr>
@@ -1104,6 +1168,10 @@
                 </a:solidFill>
               </a:ln>
             </p:spPr>
+            <p:txBody>
+              <a:bodyPr/>
+              <a:p/>
+            </p:txBody>
           </p:sp>
         </p:grpSp>
         <p:sp>
@@ -1135,7 +1203,7 @@
                   <a:solidFill>
                     <a:srgbClr val="222222"/>
                   </a:solidFill>
-                  <a:latin typeface="Comic Sans MS"/>
+                  <a:latin typeface="Times New Roman"/>
                   <a:ea typeface="Times New Roman"/>
                 </a:rPr>
                 <a:t>LLM</a:t>
@@ -1194,6 +1262,10 @@
               </a:outerShdw>
             </a:effectLst>
           </p:spPr>
+          <p:txBody>
+            <a:bodyPr/>
+            <a:p/>
+          </p:txBody>
         </p:sp>
         <p:sp>
           <p:nvSpPr>
@@ -1224,7 +1296,7 @@
                   <a:solidFill>
                     <a:srgbClr val="222222"/>
                   </a:solidFill>
-                  <a:latin typeface="Arial"/>
+                  <a:latin typeface="Times New Roman"/>
                   <a:ea typeface="Times New Roman"/>
                 </a:rPr>
                 <a:t>observe</a:t>
@@ -1283,6 +1355,10 @@
               </a:outerShdw>
             </a:effectLst>
           </p:spPr>
+          <p:txBody>
+            <a:bodyPr/>
+            <a:p/>
+          </p:txBody>
         </p:sp>
         <p:sp>
           <p:nvSpPr>
@@ -1313,7 +1389,7 @@
                   <a:solidFill>
                     <a:srgbClr val="222222"/>
                   </a:solidFill>
-                  <a:latin typeface="Arial"/>
+                  <a:latin typeface="Times New Roman"/>
                   <a:ea typeface="Times New Roman"/>
                 </a:rPr>
                 <a:t>respond</a:t>
@@ -1372,6 +1448,10 @@
               </a:outerShdw>
             </a:effectLst>
           </p:spPr>
+          <p:txBody>
+            <a:bodyPr/>
+            <a:p/>
+          </p:txBody>
         </p:sp>
         <p:sp>
           <p:nvSpPr>
@@ -1402,7 +1482,7 @@
                   <a:solidFill>
                     <a:srgbClr val="222222"/>
                   </a:solidFill>
-                  <a:latin typeface="Arial"/>
+                  <a:latin typeface="Times New Roman"/>
                   <a:ea typeface="Times New Roman"/>
                 </a:rPr>
                 <a:t>call / return</a:t>
@@ -1461,6 +1541,10 @@
               </a:outerShdw>
             </a:effectLst>
           </p:spPr>
+          <p:txBody>
+            <a:bodyPr/>
+            <a:p/>
+          </p:txBody>
         </p:sp>
         <p:sp>
           <p:nvSpPr>
@@ -1513,6 +1597,10 @@
               </a:outerShdw>
             </a:effectLst>
           </p:spPr>
+          <p:txBody>
+            <a:bodyPr/>
+            <a:p/>
+          </p:txBody>
         </p:sp>
         <p:sp>
           <p:nvSpPr>
@@ -1565,6 +1653,10 @@
               </a:outerShdw>
             </a:effectLst>
           </p:spPr>
+          <p:txBody>
+            <a:bodyPr/>
+            <a:p/>
+          </p:txBody>
         </p:sp>
         <p:sp>
           <p:nvSpPr>
@@ -1617,6 +1709,10 @@
               </a:outerShdw>
             </a:effectLst>
           </p:spPr>
+          <p:txBody>
+            <a:bodyPr/>
+            <a:p/>
+          </p:txBody>
         </p:sp>
         <p:sp>
           <p:nvSpPr>
@@ -1653,6 +1749,10 @@
               </a:solidFill>
             </a:ln>
           </p:spPr>
+          <p:txBody>
+            <a:bodyPr/>
+            <a:p/>
+          </p:txBody>
         </p:sp>
         <p:grpSp>
           <p:nvGrpSpPr>
@@ -1713,6 +1813,10 @@
                 </a:solidFill>
               </a:ln>
             </p:spPr>
+            <p:txBody>
+              <a:bodyPr/>
+              <a:p/>
+            </p:txBody>
           </p:sp>
           <p:sp>
             <p:nvSpPr>
@@ -1752,6 +1856,10 @@
                 </a:solidFill>
               </a:ln>
             </p:spPr>
+            <p:txBody>
+              <a:bodyPr/>
+              <a:p/>
+            </p:txBody>
           </p:sp>
           <p:sp>
             <p:nvSpPr>
@@ -1798,6 +1906,10 @@
                 </a:solidFill>
               </a:ln>
             </p:spPr>
+            <p:txBody>
+              <a:bodyPr/>
+              <a:p/>
+            </p:txBody>
           </p:sp>
           <p:sp>
             <p:nvSpPr>
@@ -1837,6 +1949,10 @@
                 </a:solidFill>
               </a:ln>
             </p:spPr>
+            <p:txBody>
+              <a:bodyPr/>
+              <a:p/>
+            </p:txBody>
           </p:sp>
         </p:grpSp>
         <p:sp>
@@ -1868,7 +1984,7 @@
                   <a:solidFill>
                     <a:srgbClr val="222222"/>
                   </a:solidFill>
-                  <a:latin typeface="Comic Sans MS"/>
+                  <a:latin typeface="Times New Roman"/>
                   <a:ea typeface="Times New Roman"/>
                 </a:rPr>
                 <a:t>Optimization &amp; Evolution</a:t>
@@ -1905,7 +2021,7 @@
                   <a:solidFill>
                     <a:srgbClr val="222222"/>
                   </a:solidFill>
-                  <a:latin typeface="Arial"/>
+                  <a:latin typeface="Times New Roman"/>
                   <a:ea typeface="Times New Roman"/>
                 </a:rPr>
                 <a:t>Prompts, memory and tools</a:t>
@@ -2000,6 +2116,10 @@
                 </a:solidFill>
               </a:ln>
             </p:spPr>
+            <p:txBody>
+              <a:bodyPr/>
+              <a:p/>
+            </p:txBody>
           </p:sp>
           <p:sp>
             <p:nvSpPr>
@@ -2044,6 +2164,10 @@
                 </a:solidFill>
               </a:ln>
             </p:spPr>
+            <p:txBody>
+              <a:bodyPr/>
+              <a:p/>
+            </p:txBody>
           </p:sp>
           <p:sp>
             <p:nvSpPr>
@@ -2080,6 +2204,10 @@
                 </a:solidFill>
               </a:ln>
             </p:spPr>
+            <p:txBody>
+              <a:bodyPr/>
+              <a:p/>
+            </p:txBody>
           </p:sp>
           <p:sp>
             <p:nvSpPr>
@@ -2116,6 +2244,10 @@
                 </a:solidFill>
               </a:ln>
             </p:spPr>
+            <p:txBody>
+              <a:bodyPr/>
+              <a:p/>
+            </p:txBody>
           </p:sp>
           <p:sp>
             <p:nvSpPr>
@@ -2152,6 +2284,10 @@
                 </a:solidFill>
               </a:ln>
             </p:spPr>
+            <p:txBody>
+              <a:bodyPr/>
+              <a:p/>
+            </p:txBody>
           </p:sp>
         </p:grpSp>
         <p:sp>
@@ -2205,6 +2341,10 @@
               </a:outerShdw>
             </a:effectLst>
           </p:spPr>
+          <p:txBody>
+            <a:bodyPr/>
+            <a:p/>
+          </p:txBody>
         </p:sp>
         <p:grpSp>
           <p:nvGrpSpPr>
@@ -2284,6 +2424,10 @@
                 </a:solidFill>
               </a:ln>
             </p:spPr>
+            <p:txBody>
+              <a:bodyPr/>
+              <a:p/>
+            </p:txBody>
           </p:sp>
           <p:sp>
             <p:nvSpPr>
@@ -2349,6 +2493,10 @@
                 </a:solidFill>
               </a:ln>
             </p:spPr>
+            <p:txBody>
+              <a:bodyPr/>
+              <a:p/>
+            </p:txBody>
           </p:sp>
         </p:grpSp>
         <p:sp>
@@ -2380,7 +2528,7 @@
                   <a:solidFill>
                     <a:srgbClr val="222222"/>
                   </a:solidFill>
-                  <a:latin typeface="Arial"/>
+                  <a:latin typeface="Times New Roman"/>
                   <a:ea typeface="Times New Roman"/>
                 </a:rPr>
                 <a:t>Trajectories</a:t>
@@ -2417,7 +2565,7 @@
                   <a:solidFill>
                     <a:srgbClr val="222222"/>
                   </a:solidFill>
-                  <a:latin typeface="Arial"/>
+                  <a:latin typeface="Times New Roman"/>
                   <a:ea typeface="Times New Roman"/>
                 </a:rPr>
                 <a:t>Tested updates</a:t>

--- a/artifacts/editorial_accent_20261022/pptx/Figure06_Accent.pptx
+++ b/artifacts/editorial_accent_20261022/pptx/Figure06_Accent.pptx
@@ -52,14 +52,6 @@
 <file path=ppt/slides/slide1.xml><?xml version="1.0" encoding="utf-8"?>
 <p:sld xmlns:a="http://schemas.openxmlformats.org/drawingml/2006/main" xmlns:r="http://schemas.openxmlformats.org/officeDocument/2006/relationships" xmlns:p="http://schemas.openxmlformats.org/presentationml/2006/main">
   <p:cSld>
-    <p:bg>
-      <p:bgPr>
-        <a:solidFill>
-          <a:srgbClr val="FFFFFF"/>
-        </a:solidFill>
-        <a:effectLst/>
-      </p:bgPr>
-    </p:bg>
     <p:spTree>
       <p:nvGrpSpPr>
         <p:cNvPr id="1" name=""/>
@@ -123,10 +115,6 @@
                 </a:solidFill>
               </a:ln>
             </p:spPr>
-            <p:txBody>
-              <a:bodyPr/>
-              <a:p/>
-            </p:txBody>
           </p:sp>
           <p:sp>
             <p:nvSpPr>
@@ -171,10 +159,6 @@
                 </a:solidFill>
               </a:ln>
             </p:spPr>
-            <p:txBody>
-              <a:bodyPr/>
-              <a:p/>
-            </p:txBody>
           </p:sp>
           <p:sp>
             <p:nvSpPr>
@@ -197,10 +181,6 @@
                 </a:solidFill>
               </a:ln>
             </p:spPr>
-            <p:txBody>
-              <a:bodyPr/>
-              <a:p/>
-            </p:txBody>
           </p:sp>
         </p:grpSp>
         <p:sp>
@@ -232,7 +212,7 @@
                   <a:solidFill>
                     <a:srgbClr val="222222"/>
                   </a:solidFill>
-                  <a:latin typeface="Times New Roman"/>
+                  <a:latin typeface="Comic Sans MS"/>
                   <a:ea typeface="Times New Roman"/>
                 </a:rPr>
                 <a:t>Planning &amp; Orchestration</a:t>
@@ -269,7 +249,7 @@
                   <a:solidFill>
                     <a:srgbClr val="222222"/>
                   </a:solidFill>
-                  <a:latin typeface="Times New Roman"/>
+                  <a:latin typeface="Arial"/>
                   <a:ea typeface="Times New Roman"/>
                 </a:rPr>
                 <a:t>Dependencies and handoffs</a:t>
@@ -369,10 +349,6 @@
                 </a:solidFill>
               </a:ln>
             </p:spPr>
-            <p:txBody>
-              <a:bodyPr/>
-              <a:p/>
-            </p:txBody>
           </p:sp>
           <p:sp>
             <p:nvSpPr>
@@ -443,10 +419,6 @@
                 </a:solidFill>
               </a:ln>
             </p:spPr>
-            <p:txBody>
-              <a:bodyPr/>
-              <a:p/>
-            </p:txBody>
           </p:sp>
         </p:grpSp>
         <p:sp>
@@ -478,7 +450,7 @@
                   <a:solidFill>
                     <a:srgbClr val="222222"/>
                   </a:solidFill>
-                  <a:latin typeface="Times New Roman"/>
+                  <a:latin typeface="Comic Sans MS"/>
                   <a:ea typeface="Times New Roman"/>
                 </a:rPr>
                 <a:t>Interface &amp; Interaction</a:t>
@@ -515,7 +487,7 @@
                   <a:solidFill>
                     <a:srgbClr val="222222"/>
                   </a:solidFill>
-                  <a:latin typeface="Times New Roman"/>
+                  <a:latin typeface="Arial"/>
                   <a:ea typeface="Times New Roman"/>
                 </a:rPr>
                 <a:t>Observations and actions</a:t>
@@ -635,10 +607,6 @@
                 </a:solidFill>
               </a:ln>
             </p:spPr>
-            <p:txBody>
-              <a:bodyPr/>
-              <a:p/>
-            </p:txBody>
           </p:sp>
         </p:grpSp>
         <p:sp>
@@ -670,7 +638,7 @@
                   <a:solidFill>
                     <a:srgbClr val="222222"/>
                   </a:solidFill>
-                  <a:latin typeface="Times New Roman"/>
+                  <a:latin typeface="Comic Sans MS"/>
                   <a:ea typeface="Times New Roman"/>
                 </a:rPr>
                 <a:t>Tools &amp; Execution</a:t>
@@ -707,7 +675,7 @@
                   <a:solidFill>
                     <a:srgbClr val="222222"/>
                   </a:solidFill>
-                  <a:latin typeface="Times New Roman"/>
+                  <a:latin typeface="Arial"/>
                   <a:ea typeface="Times New Roman"/>
                 </a:rPr>
                 <a:t>Calls, artifacts and status</a:t>
@@ -750,10 +718,6 @@
                 </a:solidFill>
               </a:ln>
             </p:spPr>
-            <p:txBody>
-              <a:bodyPr/>
-              <a:p/>
-            </p:txBody>
           </p:sp>
           <p:sp>
             <p:nvSpPr>
@@ -803,10 +767,6 @@
                 </a:solidFill>
               </a:ln>
             </p:spPr>
-            <p:txBody>
-              <a:bodyPr/>
-              <a:p/>
-            </p:txBody>
           </p:sp>
           <p:sp>
             <p:nvSpPr>
@@ -850,10 +810,6 @@
                 </a:solidFill>
               </a:ln>
             </p:spPr>
-            <p:txBody>
-              <a:bodyPr/>
-              <a:p/>
-            </p:txBody>
           </p:sp>
         </p:grpSp>
         <p:sp>
@@ -885,7 +841,7 @@
                   <a:solidFill>
                     <a:srgbClr val="222222"/>
                   </a:solidFill>
-                  <a:latin typeface="Times New Roman"/>
+                  <a:latin typeface="Comic Sans MS"/>
                   <a:ea typeface="Times New Roman"/>
                 </a:rPr>
                 <a:t>Memory &amp; Context</a:t>
@@ -922,7 +878,7 @@
                   <a:solidFill>
                     <a:srgbClr val="222222"/>
                   </a:solidFill>
-                  <a:latin typeface="Times New Roman"/>
+                  <a:latin typeface="Arial"/>
                   <a:ea typeface="Times New Roman"/>
                 </a:rPr>
                 <a:t>Evidence and working state</a:t>
@@ -982,10 +938,6 @@
                 </a:solidFill>
               </a:ln>
             </p:spPr>
-            <p:txBody>
-              <a:bodyPr/>
-              <a:p/>
-            </p:txBody>
           </p:sp>
           <p:sp>
             <p:nvSpPr>
@@ -1008,10 +960,6 @@
                 </a:solidFill>
               </a:ln>
             </p:spPr>
-            <p:txBody>
-              <a:bodyPr/>
-              <a:p/>
-            </p:txBody>
           </p:sp>
           <p:sp>
             <p:nvSpPr>
@@ -1048,10 +996,6 @@
                 </a:solidFill>
               </a:ln>
             </p:spPr>
-            <p:txBody>
-              <a:bodyPr/>
-              <a:p/>
-            </p:txBody>
           </p:sp>
           <p:sp>
             <p:nvSpPr>
@@ -1088,10 +1032,6 @@
                 </a:solidFill>
               </a:ln>
             </p:spPr>
-            <p:txBody>
-              <a:bodyPr/>
-              <a:p/>
-            </p:txBody>
           </p:sp>
           <p:sp>
             <p:nvSpPr>
@@ -1128,10 +1068,6 @@
                 </a:solidFill>
               </a:ln>
             </p:spPr>
-            <p:txBody>
-              <a:bodyPr/>
-              <a:p/>
-            </p:txBody>
           </p:sp>
           <p:sp>
             <p:nvSpPr>
@@ -1168,10 +1104,6 @@
                 </a:solidFill>
               </a:ln>
             </p:spPr>
-            <p:txBody>
-              <a:bodyPr/>
-              <a:p/>
-            </p:txBody>
           </p:sp>
         </p:grpSp>
         <p:sp>
@@ -1203,7 +1135,7 @@
                   <a:solidFill>
                     <a:srgbClr val="222222"/>
                   </a:solidFill>
-                  <a:latin typeface="Times New Roman"/>
+                  <a:latin typeface="Comic Sans MS"/>
                   <a:ea typeface="Times New Roman"/>
                 </a:rPr>
                 <a:t>LLM</a:t>
@@ -1262,10 +1194,6 @@
               </a:outerShdw>
             </a:effectLst>
           </p:spPr>
-          <p:txBody>
-            <a:bodyPr/>
-            <a:p/>
-          </p:txBody>
         </p:sp>
         <p:sp>
           <p:nvSpPr>
@@ -1296,7 +1224,7 @@
                   <a:solidFill>
                     <a:srgbClr val="222222"/>
                   </a:solidFill>
-                  <a:latin typeface="Times New Roman"/>
+                  <a:latin typeface="Arial"/>
                   <a:ea typeface="Times New Roman"/>
                 </a:rPr>
                 <a:t>observe</a:t>
@@ -1355,10 +1283,6 @@
               </a:outerShdw>
             </a:effectLst>
           </p:spPr>
-          <p:txBody>
-            <a:bodyPr/>
-            <a:p/>
-          </p:txBody>
         </p:sp>
         <p:sp>
           <p:nvSpPr>
@@ -1389,7 +1313,7 @@
                   <a:solidFill>
                     <a:srgbClr val="222222"/>
                   </a:solidFill>
-                  <a:latin typeface="Times New Roman"/>
+                  <a:latin typeface="Arial"/>
                   <a:ea typeface="Times New Roman"/>
                 </a:rPr>
                 <a:t>respond</a:t>
@@ -1448,10 +1372,6 @@
               </a:outerShdw>
             </a:effectLst>
           </p:spPr>
-          <p:txBody>
-            <a:bodyPr/>
-            <a:p/>
-          </p:txBody>
         </p:sp>
         <p:sp>
           <p:nvSpPr>
@@ -1482,7 +1402,7 @@
                   <a:solidFill>
                     <a:srgbClr val="222222"/>
                   </a:solidFill>
-                  <a:latin typeface="Times New Roman"/>
+                  <a:latin typeface="Arial"/>
                   <a:ea typeface="Times New Roman"/>
                 </a:rPr>
                 <a:t>call / return</a:t>
@@ -1541,10 +1461,6 @@
               </a:outerShdw>
             </a:effectLst>
           </p:spPr>
-          <p:txBody>
-            <a:bodyPr/>
-            <a:p/>
-          </p:txBody>
         </p:sp>
         <p:sp>
           <p:nvSpPr>
@@ -1597,10 +1513,6 @@
               </a:outerShdw>
             </a:effectLst>
           </p:spPr>
-          <p:txBody>
-            <a:bodyPr/>
-            <a:p/>
-          </p:txBody>
         </p:sp>
         <p:sp>
           <p:nvSpPr>
@@ -1653,10 +1565,6 @@
               </a:outerShdw>
             </a:effectLst>
           </p:spPr>
-          <p:txBody>
-            <a:bodyPr/>
-            <a:p/>
-          </p:txBody>
         </p:sp>
         <p:sp>
           <p:nvSpPr>
@@ -1709,10 +1617,6 @@
               </a:outerShdw>
             </a:effectLst>
           </p:spPr>
-          <p:txBody>
-            <a:bodyPr/>
-            <a:p/>
-          </p:txBody>
         </p:sp>
         <p:sp>
           <p:nvSpPr>
@@ -1749,10 +1653,6 @@
               </a:solidFill>
             </a:ln>
           </p:spPr>
-          <p:txBody>
-            <a:bodyPr/>
-            <a:p/>
-          </p:txBody>
         </p:sp>
         <p:grpSp>
           <p:nvGrpSpPr>
@@ -1813,10 +1713,6 @@
                 </a:solidFill>
               </a:ln>
             </p:spPr>
-            <p:txBody>
-              <a:bodyPr/>
-              <a:p/>
-            </p:txBody>
           </p:sp>
           <p:sp>
             <p:nvSpPr>
@@ -1856,10 +1752,6 @@
                 </a:solidFill>
               </a:ln>
             </p:spPr>
-            <p:txBody>
-              <a:bodyPr/>
-              <a:p/>
-            </p:txBody>
           </p:sp>
           <p:sp>
             <p:nvSpPr>
@@ -1906,10 +1798,6 @@
                 </a:solidFill>
               </a:ln>
             </p:spPr>
-            <p:txBody>
-              <a:bodyPr/>
-              <a:p/>
-            </p:txBody>
           </p:sp>
           <p:sp>
             <p:nvSpPr>
@@ -1949,10 +1837,6 @@
                 </a:solidFill>
               </a:ln>
             </p:spPr>
-            <p:txBody>
-              <a:bodyPr/>
-              <a:p/>
-            </p:txBody>
           </p:sp>
         </p:grpSp>
         <p:sp>
@@ -1984,7 +1868,7 @@
                   <a:solidFill>
                     <a:srgbClr val="222222"/>
                   </a:solidFill>
-                  <a:latin typeface="Times New Roman"/>
+                  <a:latin typeface="Comic Sans MS"/>
                   <a:ea typeface="Times New Roman"/>
                 </a:rPr>
                 <a:t>Optimization &amp; Evolution</a:t>
@@ -2021,7 +1905,7 @@
                   <a:solidFill>
                     <a:srgbClr val="222222"/>
                   </a:solidFill>
-                  <a:latin typeface="Times New Roman"/>
+                  <a:latin typeface="Arial"/>
                   <a:ea typeface="Times New Roman"/>
                 </a:rPr>
                 <a:t>Prompts, memory and tools</a:t>
@@ -2116,10 +2000,6 @@
                 </a:solidFill>
               </a:ln>
             </p:spPr>
-            <p:txBody>
-              <a:bodyPr/>
-              <a:p/>
-            </p:txBody>
           </p:sp>
           <p:sp>
             <p:nvSpPr>
@@ -2164,10 +2044,6 @@
                 </a:solidFill>
               </a:ln>
             </p:spPr>
-            <p:txBody>
-              <a:bodyPr/>
-              <a:p/>
-            </p:txBody>
           </p:sp>
           <p:sp>
             <p:nvSpPr>
@@ -2204,10 +2080,6 @@
                 </a:solidFill>
               </a:ln>
             </p:spPr>
-            <p:txBody>
-              <a:bodyPr/>
-              <a:p/>
-            </p:txBody>
           </p:sp>
           <p:sp>
             <p:nvSpPr>
@@ -2244,10 +2116,6 @@
                 </a:solidFill>
               </a:ln>
             </p:spPr>
-            <p:txBody>
-              <a:bodyPr/>
-              <a:p/>
-            </p:txBody>
           </p:sp>
           <p:sp>
             <p:nvSpPr>
@@ -2284,10 +2152,6 @@
                 </a:solidFill>
               </a:ln>
             </p:spPr>
-            <p:txBody>
-              <a:bodyPr/>
-              <a:p/>
-            </p:txBody>
           </p:sp>
         </p:grpSp>
         <p:sp>
@@ -2341,10 +2205,6 @@
               </a:outerShdw>
             </a:effectLst>
           </p:spPr>
-          <p:txBody>
-            <a:bodyPr/>
-            <a:p/>
-          </p:txBody>
         </p:sp>
         <p:grpSp>
           <p:nvGrpSpPr>
@@ -2424,10 +2284,6 @@
                 </a:solidFill>
               </a:ln>
             </p:spPr>
-            <p:txBody>
-              <a:bodyPr/>
-              <a:p/>
-            </p:txBody>
           </p:sp>
           <p:sp>
             <p:nvSpPr>
@@ -2493,10 +2349,6 @@
                 </a:solidFill>
               </a:ln>
             </p:spPr>
-            <p:txBody>
-              <a:bodyPr/>
-              <a:p/>
-            </p:txBody>
           </p:sp>
         </p:grpSp>
         <p:sp>
@@ -2528,7 +2380,7 @@
                   <a:solidFill>
                     <a:srgbClr val="222222"/>
                   </a:solidFill>
-                  <a:latin typeface="Times New Roman"/>
+                  <a:latin typeface="Arial"/>
                   <a:ea typeface="Times New Roman"/>
                 </a:rPr>
                 <a:t>Trajectories</a:t>
@@ -2565,7 +2417,7 @@
                   <a:solidFill>
                     <a:srgbClr val="222222"/>
                   </a:solidFill>
-                  <a:latin typeface="Times New Roman"/>
+                  <a:latin typeface="Arial"/>
                   <a:ea typeface="Times New Roman"/>
                 </a:rPr>
                 <a:t>Tested updates</a:t>
